--- a/docs/livrables/Workshop2026-B3-Pres.pptx
+++ b/docs/livrables/Workshop2026-B3-Pres.pptx
@@ -4021,7 +4021,7 @@
               <a:defRPr sz="2200"/>
             </a:pPr>
             <a:r>
-              <a:t>• Une IA locale décide de la conduite à tenir</a:t>
+              <a:t>• Une IA locale décide de la conduite à tenir et discute avec le colon</a:t>
             </a:r>
           </a:p>
           <a:p>
@@ -4880,17 +4880,6 @@
             <a:spAutoFit/>
           </a:bodyPr>
           <a:lstStyle/>
-          <a:p>
-            <a:pPr>
-              <a:spcAft>
-                <a:spcPts val="1000"/>
-              </a:spcAft>
-              <a:defRPr sz="2200"/>
-            </a:pPr>
-            <a:r>
-              <a:t>• Chat libre avec l'assistant</a:t>
-            </a:r>
-          </a:p>
           <a:p>
             <a:pPr>
               <a:spcAft>

--- a/docs/livrables/Workshop2026-B3-Pres.pptx
+++ b/docs/livrables/Workshop2026-B3-Pres.pptx
@@ -4483,7 +4483,7 @@
               <a:defRPr sz="2200"/>
             </a:pPr>
             <a:r>
-              <a:t>• L'IA ne rédige jamais d'instruction médicale ni de posologie</a:t>
+              <a:t>• L'IA (psychologue et médecin de bord) ne rédige jamais de posologie</a:t>
             </a:r>
           </a:p>
           <a:p>
@@ -4494,7 +4494,7 @@
               <a:defRPr sz="2200"/>
             </a:pPr>
             <a:r>
-              <a:t>• Elle choisit seulement quel protocole figé déclencher, selon des seuils</a:t>
+              <a:t>• Psychologue et médecin de bord : elle peut prescrire, mais seulement un médicament du catalogue figé</a:t>
             </a:r>
           </a:p>
           <a:p>
@@ -4505,7 +4505,18 @@
               <a:defRPr sz="2200"/>
             </a:pPr>
             <a:r>
-              <a:t>• Toute réponse contenant une dose ou un médicament est rejetée</a:t>
+              <a:t>• La dose est écrite par le serveur, jamais par le modèle ; les stocks sont économisés (délais, plafond, réserve)</a:t>
+            </a:r>
+          </a:p>
+          <a:p>
+            <a:pPr>
+              <a:spcAft>
+                <a:spcPts val="1000"/>
+              </a:spcAft>
+              <a:defRPr sz="2200"/>
+            </a:pPr>
+            <a:r>
+              <a:t>• Toute réponse contenant une dose ou un médicament non prescrit est rejetée</a:t>
             </a:r>
           </a:p>
           <a:p>
